--- a/assets/pptx/catalog-286.pptx
+++ b/assets/pptx/catalog-286.pptx
@@ -3247,7 +3247,7 @@
                 <a:ea typeface="Ebrima"/>
                 <a:cs typeface="Ebrima"/>
               </a:rPr>
-              <a:t>ቸር እግዚአብሔር ሆይ (2x)</a:t>
+              <a:t>ቸር እግዚአብሔር ሆይ 2x</a:t>
             </a:r>
           </a:p>
           <a:p>
@@ -3301,7 +3301,7 @@
                 <a:ea typeface="Ebrima"/>
                 <a:cs typeface="Ebrima"/>
               </a:rPr>
-              <a:t>ይህንን ቤት ባርክ (2x)</a:t>
+              <a:t>ይህንን ቤት ባርክ 2x</a:t>
             </a:r>
           </a:p>
           <a:p>
@@ -3319,7 +3319,7 @@
                 <a:ea typeface="Ebrima"/>
                 <a:cs typeface="Ebrima"/>
               </a:rPr>
-              <a:t>ቸር እግዚአብሔር ሆይ (2x)</a:t>
+              <a:t>ቸር እግዚአብሔር ሆይ 2x</a:t>
             </a:r>
           </a:p>
           <a:p>
@@ -3373,7 +3373,7 @@
                 <a:ea typeface="Ebrima"/>
                 <a:cs typeface="Ebrima"/>
               </a:rPr>
-              <a:t>ይህን ትዳር ባርክ (2x)</a:t>
+              <a:t>ይህን ትዳር ባርክ 2x</a:t>
             </a:r>
           </a:p>
         </p:txBody>
@@ -3525,7 +3525,7 @@
                 <a:ea typeface="Ebrima"/>
                 <a:cs typeface="Ebrima"/>
               </a:rPr>
-              <a:t>ቸር እግዚአብሔር ሆይ (2x)</a:t>
+              <a:t>ቸር እግዚአብሔር ሆይ 2x</a:t>
             </a:r>
           </a:p>
           <a:p>
@@ -3579,7 +3579,7 @@
                 <a:ea typeface="Ebrima"/>
                 <a:cs typeface="Ebrima"/>
               </a:rPr>
-              <a:t>ይህንን ቤት ባርክ (2x)</a:t>
+              <a:t>ይህንን ቤት ባርክ 2x</a:t>
             </a:r>
           </a:p>
           <a:p>
@@ -3597,7 +3597,7 @@
                 <a:ea typeface="Ebrima"/>
                 <a:cs typeface="Ebrima"/>
               </a:rPr>
-              <a:t>ቸር እግዚአብሔር ሆይ (2x)</a:t>
+              <a:t>ቸር እግዚአብሔር ሆይ 2x</a:t>
             </a:r>
           </a:p>
           <a:p>
@@ -3651,7 +3651,7 @@
                 <a:ea typeface="Ebrima"/>
                 <a:cs typeface="Ebrima"/>
               </a:rPr>
-              <a:t>ይህን ትዳር ባርክ (2x)</a:t>
+              <a:t>ይህን ትዳር ባርክ 2x</a:t>
             </a:r>
           </a:p>
         </p:txBody>
@@ -3803,7 +3803,7 @@
                 <a:ea typeface="Ebrima"/>
                 <a:cs typeface="Ebrima"/>
               </a:rPr>
-              <a:t>ቸር እግዚአብሔር ሆይ (2x)</a:t>
+              <a:t>ቸር እግዚአብሔር ሆይ 2x</a:t>
             </a:r>
           </a:p>
           <a:p>
@@ -3857,7 +3857,7 @@
                 <a:ea typeface="Ebrima"/>
                 <a:cs typeface="Ebrima"/>
               </a:rPr>
-              <a:t>ይህንን ቤት ባርክ (2x)</a:t>
+              <a:t>ይህንን ቤት ባርክ 2x</a:t>
             </a:r>
           </a:p>
           <a:p>
@@ -3875,7 +3875,7 @@
                 <a:ea typeface="Ebrima"/>
                 <a:cs typeface="Ebrima"/>
               </a:rPr>
-              <a:t>ቸር እግዚአብሔር ሆይ (2x)</a:t>
+              <a:t>ቸር እግዚአብሔር ሆይ 2x</a:t>
             </a:r>
           </a:p>
           <a:p>
@@ -3929,7 +3929,7 @@
                 <a:ea typeface="Ebrima"/>
                 <a:cs typeface="Ebrima"/>
               </a:rPr>
-              <a:t>ይህን ትዳር ባርክ (2x)</a:t>
+              <a:t>ይህን ትዳር ባርክ 2x</a:t>
             </a:r>
           </a:p>
         </p:txBody>
@@ -4081,7 +4081,7 @@
                 <a:ea typeface="Ebrima"/>
                 <a:cs typeface="Ebrima"/>
               </a:rPr>
-              <a:t>ቸር እግዚአብሔር ሆይ (2x)</a:t>
+              <a:t>ቸር እግዚአብሔር ሆይ 2x</a:t>
             </a:r>
           </a:p>
           <a:p>
@@ -4135,7 +4135,7 @@
                 <a:ea typeface="Ebrima"/>
                 <a:cs typeface="Ebrima"/>
               </a:rPr>
-              <a:t>ይህንን ቤት ባርክ (2x)</a:t>
+              <a:t>ይህንን ቤት ባርክ 2x</a:t>
             </a:r>
           </a:p>
           <a:p>
@@ -4153,7 +4153,7 @@
                 <a:ea typeface="Ebrima"/>
                 <a:cs typeface="Ebrima"/>
               </a:rPr>
-              <a:t>ቸር እግዚአብሔር ሆይ (2x)</a:t>
+              <a:t>ቸር እግዚአብሔር ሆይ 2x</a:t>
             </a:r>
           </a:p>
           <a:p>
@@ -4207,7 +4207,7 @@
                 <a:ea typeface="Ebrima"/>
                 <a:cs typeface="Ebrima"/>
               </a:rPr>
-              <a:t>ይህን ትዳር ባርክ (2x)</a:t>
+              <a:t>ይህን ትዳር ባርክ 2x</a:t>
             </a:r>
           </a:p>
         </p:txBody>
